--- a/docs/교재/통합반_오프라인/06회차/통합반_오프라인_06회차.pptx
+++ b/docs/교재/통합반_오프라인/06회차/통합반_오프라인_06회차.pptx
@@ -6345,7 +6345,7 @@
       </p:sp>
       <p:pic>
         <p:nvPicPr>
-          <p:cNvPr id="6" name="삽화:스킬문서.svg" descr="illust_7790963019679084105_1791735675.png"/>
+          <p:cNvPr id="6" name="삽화:스킬문서.svg" descr="illust_3928530341966087109_1791735675.png"/>
           <p:cNvPicPr>
             <a:picLocks noChangeAspect="1"/>
           </p:cNvPicPr>
@@ -7909,7 +7909,7 @@
       </p:sp>
       <p:pic>
         <p:nvPicPr>
-          <p:cNvPr id="6" name="삽화:두절차.svg" descr="illust_1147725615450689853_1791735675.png"/>
+          <p:cNvPr id="6" name="삽화:두절차.svg" descr="illust_946417177891314281_1791735675.png"/>
           <p:cNvPicPr>
             <a:picLocks noChangeAspect="1"/>
           </p:cNvPicPr>
@@ -10315,7 +10315,7 @@
       </p:sp>
       <p:pic>
         <p:nvPicPr>
-          <p:cNvPr id="6" name="삽화:연결의수.svg" descr="illust_4763915714960544706_1791735675.png"/>
+          <p:cNvPr id="6" name="삽화:연결의수.svg" descr="illust_3295432765756601459_1791735675.png"/>
           <p:cNvPicPr>
             <a:picLocks noChangeAspect="1"/>
           </p:cNvPicPr>
@@ -11486,7 +11486,7 @@
       </p:sp>
       <p:pic>
         <p:nvPicPr>
-          <p:cNvPr id="6" name="삽화:MCP구성.svg" descr="illust_6652098820244088914_1791735675.png"/>
+          <p:cNvPr id="6" name="삽화:MCP구성.svg" descr="illust_4617109111495006502_1791735675.png"/>
           <p:cNvPicPr>
             <a:picLocks noChangeAspect="1"/>
           </p:cNvPicPr>
@@ -14091,7 +14091,7 @@
       </p:sp>
       <p:pic>
         <p:nvPicPr>
-          <p:cNvPr id="6" name="삽화:목록호출.svg" descr="illust_8903939665927365460_1791735675.png"/>
+          <p:cNvPr id="6" name="삽화:목록호출.svg" descr="illust_7806644432609028613_1791735675.png"/>
           <p:cNvPicPr>
             <a:picLocks noChangeAspect="1"/>
           </p:cNvPicPr>
@@ -15850,7 +15850,7 @@
       </p:sp>
       <p:pic>
         <p:nvPicPr>
-          <p:cNvPr id="6" name="삽화:연결방식.svg" descr="illust_2757390902664600187_1791735675.png"/>
+          <p:cNvPr id="6" name="삽화:연결방식.svg" descr="illust_7407640504941350146_1791735675.png"/>
           <p:cNvPicPr>
             <a:picLocks noChangeAspect="1"/>
           </p:cNvPicPr>
@@ -17416,7 +17416,7 @@
         <p:spPr>
           <a:xfrm>
             <a:off x="3108960" y="4160520"/>
-            <a:ext cx="1290319" cy="347472"/>
+            <a:ext cx="822960" cy="347472"/>
           </a:xfrm>
           <a:prstGeom prst="roundRect">
             <a:avLst>
@@ -17447,7 +17447,7 @@
         <p:spPr>
           <a:xfrm>
             <a:off x="3108960" y="4160520"/>
-            <a:ext cx="1290319" cy="347472"/>
+            <a:ext cx="822960" cy="347472"/>
           </a:xfrm>
           <a:prstGeom prst="rect">
             <a:avLst/>
@@ -17472,7 +17472,7 @@
                 <a:ea typeface="맑은 고딕"/>
                 <a:cs typeface="맑은 고딕"/>
               </a:rPr>
-              <a:t>이론 · 실습</a:t>
+              <a:t>이론</a:t>
             </a:r>
           </a:p>
         </p:txBody>
@@ -19259,7 +19259,7 @@
       </p:sp>
       <p:pic>
         <p:nvPicPr>
-          <p:cNvPr id="6" name="삽화:세겹.svg" descr="illust_4320611864861572069_1791735675.png"/>
+          <p:cNvPr id="6" name="삽화:세겹.svg" descr="illust_48405480184255532_1791735675.png"/>
           <p:cNvPicPr>
             <a:picLocks noChangeAspect="1"/>
           </p:cNvPicPr>
@@ -20987,8 +20987,8 @@
         </p:nvSpPr>
         <p:spPr>
           <a:xfrm>
-            <a:off x="548640" y="2697479"/>
-            <a:ext cx="822960" cy="731520"/>
+            <a:off x="548640" y="1234440"/>
+            <a:ext cx="822960" cy="731519"/>
           </a:xfrm>
           <a:prstGeom prst="rect">
             <a:avLst/>
@@ -21026,8 +21026,8 @@
         </p:nvSpPr>
         <p:spPr>
           <a:xfrm>
-            <a:off x="1417319" y="2697479"/>
-            <a:ext cx="8488375" cy="731520"/>
+            <a:off x="1417319" y="1234440"/>
+            <a:ext cx="8488375" cy="731519"/>
           </a:xfrm>
           <a:prstGeom prst="rect">
             <a:avLst/>
@@ -21065,7 +21065,7 @@
         </p:nvSpPr>
         <p:spPr>
           <a:xfrm>
-            <a:off x="10088575" y="2916935"/>
+            <a:off x="10088575" y="1453896"/>
             <a:ext cx="1371600" cy="292608"/>
           </a:xfrm>
           <a:prstGeom prst="roundRect">
@@ -21096,7 +21096,7 @@
         </p:nvSpPr>
         <p:spPr>
           <a:xfrm>
-            <a:off x="10088575" y="2916935"/>
+            <a:off x="10088575" y="1453896"/>
             <a:ext cx="1371600" cy="292608"/>
           </a:xfrm>
           <a:prstGeom prst="rect">
@@ -21135,7 +21135,7 @@
         </p:nvSpPr>
         <p:spPr>
           <a:xfrm>
-            <a:off x="548640" y="3419856"/>
+            <a:off x="548640" y="1956816"/>
             <a:ext cx="11094415" cy="13716"/>
           </a:xfrm>
           <a:prstGeom prst="rect">
@@ -21164,8 +21164,8 @@
         </p:nvSpPr>
         <p:spPr>
           <a:xfrm>
-            <a:off x="548640" y="3429000"/>
-            <a:ext cx="822960" cy="731520"/>
+            <a:off x="548640" y="1965960"/>
+            <a:ext cx="822960" cy="731519"/>
           </a:xfrm>
           <a:prstGeom prst="rect">
             <a:avLst/>
@@ -21203,8 +21203,8 @@
         </p:nvSpPr>
         <p:spPr>
           <a:xfrm>
-            <a:off x="1417319" y="3429000"/>
-            <a:ext cx="8488375" cy="731520"/>
+            <a:off x="1417319" y="1965960"/>
+            <a:ext cx="8488375" cy="731519"/>
           </a:xfrm>
           <a:prstGeom prst="rect">
             <a:avLst/>
@@ -21242,7 +21242,7 @@
         </p:nvSpPr>
         <p:spPr>
           <a:xfrm>
-            <a:off x="10088575" y="3648456"/>
+            <a:off x="10088575" y="2185415"/>
             <a:ext cx="1371600" cy="292608"/>
           </a:xfrm>
           <a:prstGeom prst="roundRect">
@@ -21273,7 +21273,7 @@
         </p:nvSpPr>
         <p:spPr>
           <a:xfrm>
-            <a:off x="10088575" y="3648456"/>
+            <a:off x="10088575" y="2185415"/>
             <a:ext cx="1371600" cy="292608"/>
           </a:xfrm>
           <a:prstGeom prst="rect">
@@ -21312,7 +21312,7 @@
         </p:nvSpPr>
         <p:spPr>
           <a:xfrm>
-            <a:off x="548640" y="4151376"/>
+            <a:off x="548640" y="2688336"/>
             <a:ext cx="11094415" cy="13716"/>
           </a:xfrm>
           <a:prstGeom prst="rect">
@@ -21341,8 +21341,8 @@
         </p:nvSpPr>
         <p:spPr>
           <a:xfrm>
-            <a:off x="548640" y="4160520"/>
-            <a:ext cx="822960" cy="731520"/>
+            <a:off x="548640" y="2697480"/>
+            <a:ext cx="822960" cy="731519"/>
           </a:xfrm>
           <a:prstGeom prst="rect">
             <a:avLst/>
@@ -21380,8 +21380,8 @@
         </p:nvSpPr>
         <p:spPr>
           <a:xfrm>
-            <a:off x="1417319" y="4160520"/>
-            <a:ext cx="8488375" cy="731520"/>
+            <a:off x="1417319" y="2697480"/>
+            <a:ext cx="8488375" cy="731519"/>
           </a:xfrm>
           <a:prstGeom prst="rect">
             <a:avLst/>
@@ -21419,7 +21419,7 @@
         </p:nvSpPr>
         <p:spPr>
           <a:xfrm>
-            <a:off x="10088575" y="4379976"/>
+            <a:off x="10088575" y="2916936"/>
             <a:ext cx="1371600" cy="292608"/>
           </a:xfrm>
           <a:prstGeom prst="roundRect">
@@ -21450,9 +21450,363 @@
         </p:nvSpPr>
         <p:spPr>
           <a:xfrm>
+            <a:off x="10088575" y="2916936"/>
+            <a:ext cx="1371600" cy="292608"/>
+          </a:xfrm>
+          <a:prstGeom prst="rect">
+            <a:avLst/>
+          </a:prstGeom>
+          <a:noFill/>
+        </p:spPr>
+        <p:txBody>
+          <a:bodyPr wrap="square" anchor="ctr"/>
+          <a:lstStyle/>
+          <a:p>
+            <a:pPr algn="ctr">
+              <a:lnSpc>
+                <a:spcPct val="110000"/>
+              </a:lnSpc>
+            </a:pPr>
+            <a:r>
+              <a:rPr sz="1200" b="1">
+                <a:solidFill>
+                  <a:srgbClr val="13294B"/>
+                </a:solidFill>
+                <a:latin typeface="맑은 고딕"/>
+                <a:ea typeface="맑은 고딕"/>
+                <a:cs typeface="맑은 고딕"/>
+              </a:rPr>
+              <a:t>이론</a:t>
+            </a:r>
+          </a:p>
+        </p:txBody>
+      </p:sp>
+      <p:sp>
+        <p:nvSpPr>
+          <p:cNvPr id="18" name="Rectangle 17"/>
+          <p:cNvSpPr/>
+          <p:nvPr/>
+        </p:nvSpPr>
+        <p:spPr>
+          <a:xfrm>
+            <a:off x="548640" y="3419856"/>
+            <a:ext cx="11094415" cy="13716"/>
+          </a:xfrm>
+          <a:prstGeom prst="rect">
+            <a:avLst/>
+          </a:prstGeom>
+          <a:solidFill>
+            <a:srgbClr val="D3D9E1"/>
+          </a:solidFill>
+          <a:ln>
+            <a:noFill/>
+          </a:ln>
+        </p:spPr>
+        <p:txBody>
+          <a:bodyPr rtlCol="0" anchor="ctr"/>
+          <a:lstStyle/>
+          <a:p>
+            <a:pPr algn="ctr"/>
+          </a:p>
+        </p:txBody>
+      </p:sp>
+      <p:sp>
+        <p:nvSpPr>
+          <p:cNvPr id="19" name="TextBox 18"/>
+          <p:cNvSpPr txBox="1"/>
+          <p:nvPr/>
+        </p:nvSpPr>
+        <p:spPr>
+          <a:xfrm>
+            <a:off x="548640" y="3429000"/>
+            <a:ext cx="822960" cy="731519"/>
+          </a:xfrm>
+          <a:prstGeom prst="rect">
+            <a:avLst/>
+          </a:prstGeom>
+          <a:noFill/>
+        </p:spPr>
+        <p:txBody>
+          <a:bodyPr wrap="square" anchor="ctr"/>
+          <a:lstStyle/>
+          <a:p>
+            <a:pPr algn="l">
+              <a:lnSpc>
+                <a:spcPct val="110000"/>
+              </a:lnSpc>
+            </a:pPr>
+            <a:r>
+              <a:rPr sz="2200" b="1">
+                <a:solidFill>
+                  <a:srgbClr val="1A6FC4"/>
+                </a:solidFill>
+                <a:latin typeface="맑은 고딕"/>
+                <a:ea typeface="맑은 고딕"/>
+                <a:cs typeface="맑은 고딕"/>
+              </a:rPr>
+              <a:t>04</a:t>
+            </a:r>
+          </a:p>
+        </p:txBody>
+      </p:sp>
+      <p:sp>
+        <p:nvSpPr>
+          <p:cNvPr id="20" name="TextBox 19"/>
+          <p:cNvSpPr txBox="1"/>
+          <p:nvPr/>
+        </p:nvSpPr>
+        <p:spPr>
+          <a:xfrm>
+            <a:off x="1417319" y="3429000"/>
+            <a:ext cx="8488375" cy="731519"/>
+          </a:xfrm>
+          <a:prstGeom prst="rect">
+            <a:avLst/>
+          </a:prstGeom>
+          <a:noFill/>
+        </p:spPr>
+        <p:txBody>
+          <a:bodyPr wrap="square" anchor="ctr"/>
+          <a:lstStyle/>
+          <a:p>
+            <a:pPr algn="l">
+              <a:lnSpc>
+                <a:spcPct val="110000"/>
+              </a:lnSpc>
+            </a:pPr>
+            <a:r>
+              <a:rPr sz="1900" b="1">
+                <a:solidFill>
+                  <a:srgbClr val="13294B"/>
+                </a:solidFill>
+                <a:latin typeface="맑은 고딕"/>
+                <a:ea typeface="맑은 고딕"/>
+                <a:cs typeface="맑은 고딕"/>
+              </a:rPr>
+              <a:t>HYD 업무 도구의 호출과 기록 확인</a:t>
+            </a:r>
+          </a:p>
+        </p:txBody>
+      </p:sp>
+      <p:sp>
+        <p:nvSpPr>
+          <p:cNvPr id="21" name="Rounded Rectangle 20"/>
+          <p:cNvSpPr/>
+          <p:nvPr/>
+        </p:nvSpPr>
+        <p:spPr>
+          <a:xfrm>
+            <a:off x="10088575" y="3648456"/>
+            <a:ext cx="1371600" cy="292608"/>
+          </a:xfrm>
+          <a:prstGeom prst="roundRect">
+            <a:avLst>
+              <a:gd name="adj" fmla="val 50000"/>
+            </a:avLst>
+          </a:prstGeom>
+          <a:solidFill>
+            <a:srgbClr val="D3D9E1"/>
+          </a:solidFill>
+          <a:ln>
+            <a:noFill/>
+          </a:ln>
+        </p:spPr>
+        <p:txBody>
+          <a:bodyPr rtlCol="0" anchor="ctr"/>
+          <a:lstStyle/>
+          <a:p>
+            <a:pPr algn="ctr"/>
+          </a:p>
+        </p:txBody>
+      </p:sp>
+      <p:sp>
+        <p:nvSpPr>
+          <p:cNvPr id="22" name="TextBox 21"/>
+          <p:cNvSpPr txBox="1"/>
+          <p:nvPr/>
+        </p:nvSpPr>
+        <p:spPr>
+          <a:xfrm>
+            <a:off x="10088575" y="3648456"/>
+            <a:ext cx="1371600" cy="292608"/>
+          </a:xfrm>
+          <a:prstGeom prst="rect">
+            <a:avLst/>
+          </a:prstGeom>
+          <a:noFill/>
+        </p:spPr>
+        <p:txBody>
+          <a:bodyPr wrap="square" anchor="ctr"/>
+          <a:lstStyle/>
+          <a:p>
+            <a:pPr algn="ctr">
+              <a:lnSpc>
+                <a:spcPct val="110000"/>
+              </a:lnSpc>
+            </a:pPr>
+            <a:r>
+              <a:rPr sz="1200" b="1">
+                <a:solidFill>
+                  <a:srgbClr val="13294B"/>
+                </a:solidFill>
+                <a:latin typeface="맑은 고딕"/>
+                <a:ea typeface="맑은 고딕"/>
+                <a:cs typeface="맑은 고딕"/>
+              </a:rPr>
+              <a:t>실습</a:t>
+            </a:r>
+          </a:p>
+        </p:txBody>
+      </p:sp>
+      <p:sp>
+        <p:nvSpPr>
+          <p:cNvPr id="23" name="Rectangle 22"/>
+          <p:cNvSpPr/>
+          <p:nvPr/>
+        </p:nvSpPr>
+        <p:spPr>
+          <a:xfrm>
+            <a:off x="548640" y="4151376"/>
+            <a:ext cx="11094415" cy="13716"/>
+          </a:xfrm>
+          <a:prstGeom prst="rect">
+            <a:avLst/>
+          </a:prstGeom>
+          <a:solidFill>
+            <a:srgbClr val="D3D9E1"/>
+          </a:solidFill>
+          <a:ln>
+            <a:noFill/>
+          </a:ln>
+        </p:spPr>
+        <p:txBody>
+          <a:bodyPr rtlCol="0" anchor="ctr"/>
+          <a:lstStyle/>
+          <a:p>
+            <a:pPr algn="ctr"/>
+          </a:p>
+        </p:txBody>
+      </p:sp>
+      <p:sp>
+        <p:nvSpPr>
+          <p:cNvPr id="24" name="TextBox 23"/>
+          <p:cNvSpPr txBox="1"/>
+          <p:nvPr/>
+        </p:nvSpPr>
+        <p:spPr>
+          <a:xfrm>
+            <a:off x="548640" y="4160520"/>
+            <a:ext cx="822960" cy="731519"/>
+          </a:xfrm>
+          <a:prstGeom prst="rect">
+            <a:avLst/>
+          </a:prstGeom>
+          <a:noFill/>
+        </p:spPr>
+        <p:txBody>
+          <a:bodyPr wrap="square" anchor="ctr"/>
+          <a:lstStyle/>
+          <a:p>
+            <a:pPr algn="l">
+              <a:lnSpc>
+                <a:spcPct val="110000"/>
+              </a:lnSpc>
+            </a:pPr>
+            <a:r>
+              <a:rPr sz="2200" b="1">
+                <a:solidFill>
+                  <a:srgbClr val="1A6FC4"/>
+                </a:solidFill>
+                <a:latin typeface="맑은 고딕"/>
+                <a:ea typeface="맑은 고딕"/>
+                <a:cs typeface="맑은 고딕"/>
+              </a:rPr>
+              <a:t>05</a:t>
+            </a:r>
+          </a:p>
+        </p:txBody>
+      </p:sp>
+      <p:sp>
+        <p:nvSpPr>
+          <p:cNvPr id="25" name="TextBox 24"/>
+          <p:cNvSpPr txBox="1"/>
+          <p:nvPr/>
+        </p:nvSpPr>
+        <p:spPr>
+          <a:xfrm>
+            <a:off x="1417319" y="4160520"/>
+            <a:ext cx="8488375" cy="731519"/>
+          </a:xfrm>
+          <a:prstGeom prst="rect">
+            <a:avLst/>
+          </a:prstGeom>
+          <a:noFill/>
+        </p:spPr>
+        <p:txBody>
+          <a:bodyPr wrap="square" anchor="ctr"/>
+          <a:lstStyle/>
+          <a:p>
+            <a:pPr algn="l">
+              <a:lnSpc>
+                <a:spcPct val="110000"/>
+              </a:lnSpc>
+            </a:pPr>
+            <a:r>
+              <a:rPr sz="1900" b="1">
+                <a:solidFill>
+                  <a:srgbClr val="13294B"/>
+                </a:solidFill>
+                <a:latin typeface="맑은 고딕"/>
+                <a:ea typeface="맑은 고딕"/>
+                <a:cs typeface="맑은 고딕"/>
+              </a:rPr>
+              <a:t>서로 다른 MCP 서버의 연결과 비교</a:t>
+            </a:r>
+          </a:p>
+        </p:txBody>
+      </p:sp>
+      <p:sp>
+        <p:nvSpPr>
+          <p:cNvPr id="26" name="Rounded Rectangle 25"/>
+          <p:cNvSpPr/>
+          <p:nvPr/>
+        </p:nvSpPr>
+        <p:spPr>
+          <a:xfrm>
             <a:off x="10088575" y="4379976"/>
             <a:ext cx="1371600" cy="292608"/>
           </a:xfrm>
+          <a:prstGeom prst="roundRect">
+            <a:avLst>
+              <a:gd name="adj" fmla="val 50000"/>
+            </a:avLst>
+          </a:prstGeom>
+          <a:solidFill>
+            <a:srgbClr val="D3D9E1"/>
+          </a:solidFill>
+          <a:ln>
+            <a:noFill/>
+          </a:ln>
+        </p:spPr>
+        <p:txBody>
+          <a:bodyPr rtlCol="0" anchor="ctr"/>
+          <a:lstStyle/>
+          <a:p>
+            <a:pPr algn="ctr"/>
+          </a:p>
+        </p:txBody>
+      </p:sp>
+      <p:sp>
+        <p:nvSpPr>
+          <p:cNvPr id="27" name="TextBox 26"/>
+          <p:cNvSpPr txBox="1"/>
+          <p:nvPr/>
+        </p:nvSpPr>
+        <p:spPr>
+          <a:xfrm>
+            <a:off x="10088575" y="4379976"/>
+            <a:ext cx="1371600" cy="292608"/>
+          </a:xfrm>
           <a:prstGeom prst="rect">
             <a:avLst/>
           </a:prstGeom>
@@ -21476,14 +21830,368 @@
                 <a:ea typeface="맑은 고딕"/>
                 <a:cs typeface="맑은 고딕"/>
               </a:rPr>
-              <a:t>이론 · 실습</a:t>
-            </a:r>
-          </a:p>
-        </p:txBody>
-      </p:sp>
-      <p:sp>
-        <p:nvSpPr>
-          <p:cNvPr id="18" name="TextBox 17"/>
+              <a:t>실습</a:t>
+            </a:r>
+          </a:p>
+        </p:txBody>
+      </p:sp>
+      <p:sp>
+        <p:nvSpPr>
+          <p:cNvPr id="28" name="Rectangle 27"/>
+          <p:cNvSpPr/>
+          <p:nvPr/>
+        </p:nvSpPr>
+        <p:spPr>
+          <a:xfrm>
+            <a:off x="548640" y="4882896"/>
+            <a:ext cx="11094415" cy="13716"/>
+          </a:xfrm>
+          <a:prstGeom prst="rect">
+            <a:avLst/>
+          </a:prstGeom>
+          <a:solidFill>
+            <a:srgbClr val="D3D9E1"/>
+          </a:solidFill>
+          <a:ln>
+            <a:noFill/>
+          </a:ln>
+        </p:spPr>
+        <p:txBody>
+          <a:bodyPr rtlCol="0" anchor="ctr"/>
+          <a:lstStyle/>
+          <a:p>
+            <a:pPr algn="ctr"/>
+          </a:p>
+        </p:txBody>
+      </p:sp>
+      <p:sp>
+        <p:nvSpPr>
+          <p:cNvPr id="29" name="TextBox 28"/>
+          <p:cNvSpPr txBox="1"/>
+          <p:nvPr/>
+        </p:nvSpPr>
+        <p:spPr>
+          <a:xfrm>
+            <a:off x="548640" y="4892040"/>
+            <a:ext cx="822960" cy="731519"/>
+          </a:xfrm>
+          <a:prstGeom prst="rect">
+            <a:avLst/>
+          </a:prstGeom>
+          <a:noFill/>
+        </p:spPr>
+        <p:txBody>
+          <a:bodyPr wrap="square" anchor="ctr"/>
+          <a:lstStyle/>
+          <a:p>
+            <a:pPr algn="l">
+              <a:lnSpc>
+                <a:spcPct val="110000"/>
+              </a:lnSpc>
+            </a:pPr>
+            <a:r>
+              <a:rPr sz="2200" b="1">
+                <a:solidFill>
+                  <a:srgbClr val="1A6FC4"/>
+                </a:solidFill>
+                <a:latin typeface="맑은 고딕"/>
+                <a:ea typeface="맑은 고딕"/>
+                <a:cs typeface="맑은 고딕"/>
+              </a:rPr>
+              <a:t>06</a:t>
+            </a:r>
+          </a:p>
+        </p:txBody>
+      </p:sp>
+      <p:sp>
+        <p:nvSpPr>
+          <p:cNvPr id="30" name="TextBox 29"/>
+          <p:cNvSpPr txBox="1"/>
+          <p:nvPr/>
+        </p:nvSpPr>
+        <p:spPr>
+          <a:xfrm>
+            <a:off x="1417319" y="4892040"/>
+            <a:ext cx="8488375" cy="731519"/>
+          </a:xfrm>
+          <a:prstGeom prst="rect">
+            <a:avLst/>
+          </a:prstGeom>
+          <a:noFill/>
+        </p:spPr>
+        <p:txBody>
+          <a:bodyPr wrap="square" anchor="ctr"/>
+          <a:lstStyle/>
+          <a:p>
+            <a:pPr algn="l">
+              <a:lnSpc>
+                <a:spcPct val="110000"/>
+              </a:lnSpc>
+            </a:pPr>
+            <a:r>
+              <a:rPr sz="1900" b="1">
+                <a:solidFill>
+                  <a:srgbClr val="13294B"/>
+                </a:solidFill>
+                <a:latin typeface="맑은 고딕"/>
+                <a:ea typeface="맑은 고딕"/>
+                <a:cs typeface="맑은 고딕"/>
+              </a:rPr>
+              <a:t>회의 내용을 후속 업무로 바꾸는 스킬 작성</a:t>
+            </a:r>
+          </a:p>
+        </p:txBody>
+      </p:sp>
+      <p:sp>
+        <p:nvSpPr>
+          <p:cNvPr id="31" name="Rounded Rectangle 30"/>
+          <p:cNvSpPr/>
+          <p:nvPr/>
+        </p:nvSpPr>
+        <p:spPr>
+          <a:xfrm>
+            <a:off x="10088575" y="5111496"/>
+            <a:ext cx="1371600" cy="292608"/>
+          </a:xfrm>
+          <a:prstGeom prst="roundRect">
+            <a:avLst>
+              <a:gd name="adj" fmla="val 50000"/>
+            </a:avLst>
+          </a:prstGeom>
+          <a:solidFill>
+            <a:srgbClr val="D3D9E1"/>
+          </a:solidFill>
+          <a:ln>
+            <a:noFill/>
+          </a:ln>
+        </p:spPr>
+        <p:txBody>
+          <a:bodyPr rtlCol="0" anchor="ctr"/>
+          <a:lstStyle/>
+          <a:p>
+            <a:pPr algn="ctr"/>
+          </a:p>
+        </p:txBody>
+      </p:sp>
+      <p:sp>
+        <p:nvSpPr>
+          <p:cNvPr id="32" name="TextBox 31"/>
+          <p:cNvSpPr txBox="1"/>
+          <p:nvPr/>
+        </p:nvSpPr>
+        <p:spPr>
+          <a:xfrm>
+            <a:off x="10088575" y="5111496"/>
+            <a:ext cx="1371600" cy="292608"/>
+          </a:xfrm>
+          <a:prstGeom prst="rect">
+            <a:avLst/>
+          </a:prstGeom>
+          <a:noFill/>
+        </p:spPr>
+        <p:txBody>
+          <a:bodyPr wrap="square" anchor="ctr"/>
+          <a:lstStyle/>
+          <a:p>
+            <a:pPr algn="ctr">
+              <a:lnSpc>
+                <a:spcPct val="110000"/>
+              </a:lnSpc>
+            </a:pPr>
+            <a:r>
+              <a:rPr sz="1200" b="1">
+                <a:solidFill>
+                  <a:srgbClr val="13294B"/>
+                </a:solidFill>
+                <a:latin typeface="맑은 고딕"/>
+                <a:ea typeface="맑은 고딕"/>
+                <a:cs typeface="맑은 고딕"/>
+              </a:rPr>
+              <a:t>실습</a:t>
+            </a:r>
+          </a:p>
+        </p:txBody>
+      </p:sp>
+      <p:sp>
+        <p:nvSpPr>
+          <p:cNvPr id="33" name="Rectangle 32"/>
+          <p:cNvSpPr/>
+          <p:nvPr/>
+        </p:nvSpPr>
+        <p:spPr>
+          <a:xfrm>
+            <a:off x="548640" y="5614416"/>
+            <a:ext cx="11094415" cy="13716"/>
+          </a:xfrm>
+          <a:prstGeom prst="rect">
+            <a:avLst/>
+          </a:prstGeom>
+          <a:solidFill>
+            <a:srgbClr val="D3D9E1"/>
+          </a:solidFill>
+          <a:ln>
+            <a:noFill/>
+          </a:ln>
+        </p:spPr>
+        <p:txBody>
+          <a:bodyPr rtlCol="0" anchor="ctr"/>
+          <a:lstStyle/>
+          <a:p>
+            <a:pPr algn="ctr"/>
+          </a:p>
+        </p:txBody>
+      </p:sp>
+      <p:sp>
+        <p:nvSpPr>
+          <p:cNvPr id="34" name="TextBox 33"/>
+          <p:cNvSpPr txBox="1"/>
+          <p:nvPr/>
+        </p:nvSpPr>
+        <p:spPr>
+          <a:xfrm>
+            <a:off x="548640" y="5623560"/>
+            <a:ext cx="822960" cy="731519"/>
+          </a:xfrm>
+          <a:prstGeom prst="rect">
+            <a:avLst/>
+          </a:prstGeom>
+          <a:noFill/>
+        </p:spPr>
+        <p:txBody>
+          <a:bodyPr wrap="square" anchor="ctr"/>
+          <a:lstStyle/>
+          <a:p>
+            <a:pPr algn="l">
+              <a:lnSpc>
+                <a:spcPct val="110000"/>
+              </a:lnSpc>
+            </a:pPr>
+            <a:r>
+              <a:rPr sz="2200" b="1">
+                <a:solidFill>
+                  <a:srgbClr val="1A6FC4"/>
+                </a:solidFill>
+                <a:latin typeface="맑은 고딕"/>
+                <a:ea typeface="맑은 고딕"/>
+                <a:cs typeface="맑은 고딕"/>
+              </a:rPr>
+              <a:t>07</a:t>
+            </a:r>
+          </a:p>
+        </p:txBody>
+      </p:sp>
+      <p:sp>
+        <p:nvSpPr>
+          <p:cNvPr id="35" name="TextBox 34"/>
+          <p:cNvSpPr txBox="1"/>
+          <p:nvPr/>
+        </p:nvSpPr>
+        <p:spPr>
+          <a:xfrm>
+            <a:off x="1417319" y="5623560"/>
+            <a:ext cx="8488375" cy="731519"/>
+          </a:xfrm>
+          <a:prstGeom prst="rect">
+            <a:avLst/>
+          </a:prstGeom>
+          <a:noFill/>
+        </p:spPr>
+        <p:txBody>
+          <a:bodyPr wrap="square" anchor="ctr"/>
+          <a:lstStyle/>
+          <a:p>
+            <a:pPr algn="l">
+              <a:lnSpc>
+                <a:spcPct val="110000"/>
+              </a:lnSpc>
+            </a:pPr>
+            <a:r>
+              <a:rPr sz="1900" b="1">
+                <a:solidFill>
+                  <a:srgbClr val="13294B"/>
+                </a:solidFill>
+                <a:latin typeface="맑은 고딕"/>
+                <a:ea typeface="맑은 고딕"/>
+                <a:cs typeface="맑은 고딕"/>
+              </a:rPr>
+              <a:t>여러 도구를 조합한 업무 결과의 완성</a:t>
+            </a:r>
+          </a:p>
+        </p:txBody>
+      </p:sp>
+      <p:sp>
+        <p:nvSpPr>
+          <p:cNvPr id="36" name="Rounded Rectangle 35"/>
+          <p:cNvSpPr/>
+          <p:nvPr/>
+        </p:nvSpPr>
+        <p:spPr>
+          <a:xfrm>
+            <a:off x="10088575" y="5843016"/>
+            <a:ext cx="1371600" cy="292608"/>
+          </a:xfrm>
+          <a:prstGeom prst="roundRect">
+            <a:avLst>
+              <a:gd name="adj" fmla="val 50000"/>
+            </a:avLst>
+          </a:prstGeom>
+          <a:solidFill>
+            <a:srgbClr val="D3D9E1"/>
+          </a:solidFill>
+          <a:ln>
+            <a:noFill/>
+          </a:ln>
+        </p:spPr>
+        <p:txBody>
+          <a:bodyPr rtlCol="0" anchor="ctr"/>
+          <a:lstStyle/>
+          <a:p>
+            <a:pPr algn="ctr"/>
+          </a:p>
+        </p:txBody>
+      </p:sp>
+      <p:sp>
+        <p:nvSpPr>
+          <p:cNvPr id="37" name="TextBox 36"/>
+          <p:cNvSpPr txBox="1"/>
+          <p:nvPr/>
+        </p:nvSpPr>
+        <p:spPr>
+          <a:xfrm>
+            <a:off x="10088575" y="5843016"/>
+            <a:ext cx="1371600" cy="292608"/>
+          </a:xfrm>
+          <a:prstGeom prst="rect">
+            <a:avLst/>
+          </a:prstGeom>
+          <a:noFill/>
+        </p:spPr>
+        <p:txBody>
+          <a:bodyPr wrap="square" anchor="ctr"/>
+          <a:lstStyle/>
+          <a:p>
+            <a:pPr algn="ctr">
+              <a:lnSpc>
+                <a:spcPct val="110000"/>
+              </a:lnSpc>
+            </a:pPr>
+            <a:r>
+              <a:rPr sz="1200" b="1">
+                <a:solidFill>
+                  <a:srgbClr val="13294B"/>
+                </a:solidFill>
+                <a:latin typeface="맑은 고딕"/>
+                <a:ea typeface="맑은 고딕"/>
+                <a:cs typeface="맑은 고딕"/>
+              </a:rPr>
+              <a:t>실습</a:t>
+            </a:r>
+          </a:p>
+        </p:txBody>
+      </p:sp>
+      <p:sp>
+        <p:nvSpPr>
+          <p:cNvPr id="38" name="TextBox 37"/>
           <p:cNvSpPr txBox="1"/>
           <p:nvPr/>
         </p:nvSpPr>
@@ -31753,7 +32461,7 @@
       </p:sp>
       <p:pic>
         <p:nvPicPr>
-          <p:cNvPr id="6" name="삽화:고리_1.svg" descr="illust_8979664987968752257_1791735675.png"/>
+          <p:cNvPr id="6" name="삽화:고리_1.svg" descr="illust_5084088226145509358_1791735675.png"/>
           <p:cNvPicPr>
             <a:picLocks noChangeAspect="1"/>
           </p:cNvPicPr>

--- a/docs/교재/통합반_오프라인/06회차/통합반_오프라인_06회차.pptx
+++ b/docs/교재/통합반_오프라인/06회차/통합반_오프라인_06회차.pptx
@@ -2363,7 +2363,7 @@
           <a:lstStyle/>
           <a:p>
             <a:r>
-              <a:t>그렇게 적어 둔 지침을 에이전트 스킬, Agent Skill이라고 합니다. 스킬의 본체는 SKILL.md라는 파일 하나이고, 스킬 이름과 같은 폴더 안에 놓입니다. HYD에서 쿨러 과열 경보에 쓰는 스킬의 이름은 cooling-emergency-response입니다.</a:t>
+              <a:t>그렇게 적어 둔 지침을 에이전트 스킬, Agent Skill이라고 합니다. 스킬의 본체는 SKILL.md라는 파일 하나이고, 스킬 이름과 같은 폴더 안에 놓입니다. HYD에서 쿨러 성능 저하 경보에 쓰는 스킬의 이름은 cooling-emergency-response입니다.</a:t>
             </a:r>
           </a:p>
         </p:txBody>
@@ -6345,7 +6345,7 @@
       </p:sp>
       <p:pic>
         <p:nvPicPr>
-          <p:cNvPr id="6" name="삽화:스킬문서.svg" descr="illust_3928530341966087109_1791735675.png"/>
+          <p:cNvPr id="6" name="삽화:스킬문서.svg" descr="illust_3230994976117156694_1791735675.png"/>
           <p:cNvPicPr>
             <a:picLocks noChangeAspect="1"/>
           </p:cNvPicPr>
@@ -7909,7 +7909,7 @@
       </p:sp>
       <p:pic>
         <p:nvPicPr>
-          <p:cNvPr id="6" name="삽화:두절차.svg" descr="illust_946417177891314281_1791735675.png"/>
+          <p:cNvPr id="6" name="삽화:두절차.svg" descr="illust_3021818306168869789_1791735675.png"/>
           <p:cNvPicPr>
             <a:picLocks noChangeAspect="1"/>
           </p:cNvPicPr>
@@ -10315,7 +10315,7 @@
       </p:sp>
       <p:pic>
         <p:nvPicPr>
-          <p:cNvPr id="6" name="삽화:연결의수.svg" descr="illust_3295432765756601459_1791735675.png"/>
+          <p:cNvPr id="6" name="삽화:연결의수.svg" descr="illust_4099655622420581267_1791735675.png"/>
           <p:cNvPicPr>
             <a:picLocks noChangeAspect="1"/>
           </p:cNvPicPr>
@@ -11486,7 +11486,7 @@
       </p:sp>
       <p:pic>
         <p:nvPicPr>
-          <p:cNvPr id="6" name="삽화:MCP구성.svg" descr="illust_4617109111495006502_1791735675.png"/>
+          <p:cNvPr id="6" name="삽화:MCP구성.svg" descr="illust_896656510335111535_1791735675.png"/>
           <p:cNvPicPr>
             <a:picLocks noChangeAspect="1"/>
           </p:cNvPicPr>
@@ -13143,7 +13143,7 @@
                 <a:ea typeface="맑은 고딕"/>
                 <a:cs typeface="맑은 고딕"/>
               </a:rPr>
-              <a:t>• 스킬 파일의 머리말, 절차, 결과가 맡는 일을 원문에서 짚는다</a:t>
+              <a:t>• 스킬 파일의 머리말과 절차, 결과가 맡는 일을 원문에서 짚는다</a:t>
             </a:r>
           </a:p>
           <a:p>
@@ -13383,7 +13383,7 @@
                 <a:ea typeface="맑은 고딕"/>
                 <a:cs typeface="맑은 고딕"/>
               </a:rPr>
-              <a:t>• 호스트, 클라이언트, 서버, 도구의 관계를 설명한다</a:t>
+              <a:t>• 호스트와 클라이언트, 서버와 도구의 관계를 설명한다</a:t>
             </a:r>
           </a:p>
           <a:p>
@@ -14091,7 +14091,7 @@
       </p:sp>
       <p:pic>
         <p:nvPicPr>
-          <p:cNvPr id="6" name="삽화:목록호출.svg" descr="illust_7806644432609028613_1791735675.png"/>
+          <p:cNvPr id="6" name="삽화:목록호출.svg" descr="illust_5081964999853630136_1791735675.png"/>
           <p:cNvPicPr>
             <a:picLocks noChangeAspect="1"/>
           </p:cNvPicPr>
@@ -15850,7 +15850,7 @@
       </p:sp>
       <p:pic>
         <p:nvPicPr>
-          <p:cNvPr id="6" name="삽화:연결방식.svg" descr="illust_7407640504941350146_1791735675.png"/>
+          <p:cNvPr id="6" name="삽화:연결방식.svg" descr="illust_5754572423338997409_1791735675.png"/>
           <p:cNvPicPr>
             <a:picLocks noChangeAspect="1"/>
           </p:cNvPicPr>
@@ -19259,7 +19259,7 @@
       </p:sp>
       <p:pic>
         <p:nvPicPr>
-          <p:cNvPr id="6" name="삽화:세겹.svg" descr="illust_48405480184255532_1791735675.png"/>
+          <p:cNvPr id="6" name="삽화:세겹.svg" descr="illust_4128192422178847090_1791735675.png"/>
           <p:cNvPicPr>
             <a:picLocks noChangeAspect="1"/>
           </p:cNvPicPr>
@@ -32461,7 +32461,7 @@
       </p:sp>
       <p:pic>
         <p:nvPicPr>
-          <p:cNvPr id="6" name="삽화:고리_1.svg" descr="illust_5084088226145509358_1791735675.png"/>
+          <p:cNvPr id="6" name="삽화:고리_1.svg" descr="illust_2964633879719843670_1791735675.png"/>
           <p:cNvPicPr>
             <a:picLocks noChangeAspect="1"/>
           </p:cNvPicPr>
@@ -33516,7 +33516,7 @@
                 <a:ea typeface="맑은 고딕"/>
                 <a:cs typeface="맑은 고딕"/>
               </a:rPr>
-              <a:t>쿨러 과열 경보에 쓰는 스킬의 이름은 cooling-emergency-response이다.</a:t>
+              <a:t>쿨러 성능 저하 경보에 쓰는 스킬의 이름은 cooling-emergency-response이다.</a:t>
             </a:r>
           </a:p>
         </p:txBody>

--- a/docs/교재/통합반_오프라인/06회차/통합반_오프라인_06회차.pptx
+++ b/docs/교재/통합반_오프라인/06회차/통합반_오프라인_06회차.pptx
@@ -543,7 +543,7 @@
           <a:lstStyle/>
           <a:p>
             <a:r>
-              <a:t>5회차에는 에이전트가 도구를 부르며 일하는 모습을 보았습니다. 오늘은 그 에이전트가 일하는 방법을 어디에 적어 두는지, 도구는 어떻게 연결되는지, 연결할 때 무엇을 지켜야 하는지를 차례로 다룹니다. 이 네 가지를 자료 없이 자신의 말로 설명할 수 있는지가 오늘의 기준입니다.</a:t>
+              <a:t>5회차에는 에이전트가 도구를 부르며 일하는 모습을 보았습니다. 오늘은 그 에이전트가 일하는 방법을 어디에 적어 두는지, 도구는 어떻게 연결되는지, 연결할 때 무엇을 지켜야 하는지를 차례로 다룹니다. 수업이 끝났을 때 SKILL.md 한 편과 서버 설정 한 건을 놓고 어디에 무엇이 적혀 있는지를 짚을 수 있어야 합니다.</a:t>
             </a:r>
           </a:p>
         </p:txBody>
@@ -1103,7 +1103,7 @@
           <a:lstStyle/>
           <a:p>
             <a:r>
-              <a:t>도구 목록에 든 항목 하나를 그대로 옮겼습니다. 구매 쪽 서버가 내주는 part_quotes라는 도구입니다. 이름과 설명과 입력 스키마가 있고, 모델은 이 설명을 읽고 지금 이 도구를 부를지를 정합니다. 그래서 도구의 설명은 사람이 읽는 주석이 아니라 모델의 선택을 좌우하는 글입니다.</a:t>
+              <a:t>도구 목록에 든 항목 하나를 그대로 옮겼습니다. 구매 쪽 업무 DB 서버가 내주는 part_quotes라는 도구입니다. 이름과 설명과 입력 스키마가 있고, 모델은 이 설명을 읽고 지금 이 도구를 부를지를 정합니다. 그래서 도구의 설명은 사람이 읽는 주석이 아니라 모델의 선택을 좌우하는 글입니다.</a:t>
             </a:r>
           </a:p>
         </p:txBody>
@@ -1593,7 +1593,7 @@
           <a:lstStyle/>
           <a:p>
             <a:r>
-              <a:t>응답의 네 가지 경우를 구분합니다. 조회가 성공했는데 결과가 0행이면 「없음」이 사실입니다. 호출이 실패했거나 정해진 시간을 넘겼으면 값이 있는지 없는지를 알 수 없으므로 실패로 적어야 합니다. 실패를 0이나 빈 값으로 바꾸면 재고가 없다는 틀린 사실이 판단에 들어갑니다. 응답이 잘렸을 때는 읽지 못한 범위를 밝힙니다.</a:t>
+              <a:t>값이 없는 것과 조회에 실패한 것은 에이전트의 멈춤 조건에서 이미 구분했고, 위의 두 줄이 그것입니다. 도구를 연결해 쓰면 경우가 둘 더 생깁니다. 정해진 시간 안에 응답하지 못한 호출은 오류로 돌아오므로 실패로 적고, 응답이 잘렸을 때는 읽지 못한 범위를 밝힙니다. 어느 경우에도 0이나 빈 값으로 바꾸어 적지 않습니다.</a:t>
             </a:r>
           </a:p>
         </p:txBody>
@@ -1943,7 +1943,7 @@
           <a:lstStyle/>
           <a:p>
             <a:r>
-              <a:t>오늘 나온 약어와 영문 용어의 정식 명칭을 한곳에 모았습니다. 이 다섯 개와 함께 호스트, 클라이언트, 서버, 도구, 입력 스키마, 허용 목록이 오늘의 용어입니다. 하나를 골라 자료를 덮고 자신의 문장으로 써 보시기 바랍니다.</a:t>
+              <a:t>오늘 나온 약어와 영문 용어의 정식 명칭을 한곳에 모았습니다. 이 다섯 개와 함께 호스트, 클라이언트, 서버, 도구, 입력 스키마, 허용 목록이 오늘의 용어입니다. 용어마다 스킬 쪽의 말인지 연결 쪽의 말인지를 갈라 보시기 바랍니다.</a:t>
             </a:r>
           </a:p>
         </p:txBody>
@@ -2293,7 +2293,7 @@
           <a:lstStyle/>
           <a:p>
             <a:r>
-              <a:t>정답보다 판단 기준이 중요합니다. 첫 문항의 1번과 3번은 스킬을 고치는 일이어서 빠진 연결을 채우지 못합니다. 둘째 문항의 1번은 실패를 값 없음으로 바꾼 것입니다. 셋째 문항의 2번은 표시가 없는 도구를 읽기로 본 것이며, 표시가 없으면 읽는 도구인지 알 수 없으므로 거절됩니다.</a:t>
+              <a:t>오답이 어느 구분을 놓쳤는지를 함께 짚습니다. 첫 문항의 1번과 3번은 스킬을 고치는 일이어서 빠진 연결을 채우지 못합니다. 둘째 문항의 1번은 실패를 값 없음으로 바꾼 것입니다. 셋째 문항의 2번은 표시가 없는 도구를 읽기로 본 것이며, 표시가 없으면 읽는 도구인지 알 수 없으므로 거절됩니다.</a:t>
             </a:r>
           </a:p>
         </p:txBody>
@@ -2433,7 +2433,7 @@
           <a:lstStyle/>
           <a:p>
             <a:r>
-              <a:t>에이전트가 실제로 읽은 SKILL.md의 앞부분입니다. 줄 세 개짜리 구분선 사이가 머리말이고, 이름과 설명 두 항목이 들어 있습니다. 그 아래 본문은 경보 한 건에서 원인을 진단하고 조치 후보를 비교해 추천 카드와 대안을 올린다는 요약으로 시작합니다. 마지막 두 줄은 이 스킬이 조회와 계산까지만 한다는 범위의 한계입니다.</a:t>
+              <a:t>에이전트가 실제로 읽은 SKILL.md의 앞부분입니다. 줄 세 개짜리 구분선 사이가 머리말이고, 이름과 설명 두 항목이 들어 있습니다. 그 아래 본문은 경보 한 건에서 원인을 진단하고 조치 후보를 비교해 추천 카드와 대안을 올린다는 요약으로 시작합니다. 원문의 「추천 카드」가 곧 추천안이고, 「쿨러 과열 경보」는 쿨러 성능 저하 경보를 가리킵니다. 마지막 두 줄은 이 스킬이 조회와 계산까지만 한다는 범위의 한계입니다.</a:t>
             </a:r>
           </a:p>
         </p:txBody>
@@ -2643,7 +2643,7 @@
           <a:lstStyle/>
           <a:p>
             <a:r>
-              <a:t>위는 SKILL.md의 결과 절이고 아래는 에이전트가 실제로 쓴 출력 파일입니다. 결과 절에 적힌 다섯 항목이 출력의 최상위 항목과 하나씩 맞습니다. 항목의 이름이 정해져 있어서 사람에게 승인을 받는 다음 단계가 실행마다 같은 이름으로 값을 읽습니다. 추천 값 skill:sop-cool-11은 팬 최대 운전을 가리키는 식별자입니다.</a:t>
+              <a:t>위는 SKILL.md의 결과 절이고 아래는 에이전트가 실제로 쓴 출력 파일입니다. 구조화 출력의 다섯 항목은 이 결과 절이 이름을 정해 둔 것이어서, 사람에게 승인을 받는 다음 단계가 실행마다 같은 이름으로 값을 읽습니다. 추천 값 skill:sop-cool-11은 팬 최대 운전을 가리키는 식별자입니다. 이 파일은 같은 스킬로 처리한 같은 종류의 다른 쿨러 경보 한 건의 기록이어서, 판단 번호가 앞에서 본 사건의 것과 다릅니다.</a:t>
             </a:r>
           </a:p>
         </p:txBody>
@@ -6345,7 +6345,7 @@
       </p:sp>
       <p:pic>
         <p:nvPicPr>
-          <p:cNvPr id="6" name="삽화:스킬문서.svg" descr="illust_3230994976117156694_1791735675.png"/>
+          <p:cNvPr id="6" name="삽화:스킬문서.svg" descr="illust_3352974254540190087_1791735675.png"/>
           <p:cNvPicPr>
             <a:picLocks noChangeAspect="1"/>
           </p:cNvPicPr>
@@ -7909,7 +7909,7 @@
       </p:sp>
       <p:pic>
         <p:nvPicPr>
-          <p:cNvPr id="6" name="삽화:두절차.svg" descr="illust_3021818306168869789_1791735675.png"/>
+          <p:cNvPr id="6" name="삽화:두절차.svg" descr="illust_242307851978587257_1791735675.png"/>
           <p:cNvPicPr>
             <a:picLocks noChangeAspect="1"/>
           </p:cNvPicPr>
@@ -10315,7 +10315,7 @@
       </p:sp>
       <p:pic>
         <p:nvPicPr>
-          <p:cNvPr id="6" name="삽화:연결의수.svg" descr="illust_4099655622420581267_1791735675.png"/>
+          <p:cNvPr id="6" name="삽화:연결의수.svg" descr="illust_3332905791933954658_1791735675.png"/>
           <p:cNvPicPr>
             <a:picLocks noChangeAspect="1"/>
           </p:cNvPicPr>
@@ -11486,7 +11486,7 @@
       </p:sp>
       <p:pic>
         <p:nvPicPr>
-          <p:cNvPr id="6" name="삽화:MCP구성.svg" descr="illust_896656510335111535_1791735675.png"/>
+          <p:cNvPr id="6" name="삽화:MCP구성.svg" descr="illust_1171167847395386957_1791735675.png"/>
           <p:cNvPicPr>
             <a:picLocks noChangeAspect="1"/>
           </p:cNvPicPr>
@@ -14091,7 +14091,7 @@
       </p:sp>
       <p:pic>
         <p:nvPicPr>
-          <p:cNvPr id="6" name="삽화:목록호출.svg" descr="illust_5081964999853630136_1791735675.png"/>
+          <p:cNvPr id="6" name="삽화:목록호출.svg" descr="illust_6801412339466788897_1791735675.png"/>
           <p:cNvPicPr>
             <a:picLocks noChangeAspect="1"/>
           </p:cNvPicPr>
@@ -15850,7 +15850,7 @@
       </p:sp>
       <p:pic>
         <p:nvPicPr>
-          <p:cNvPr id="6" name="삽화:연결방식.svg" descr="illust_5754572423338997409_1791735675.png"/>
+          <p:cNvPr id="6" name="삽화:연결방식.svg" descr="illust_705113174053857914_1791735675.png"/>
           <p:cNvPicPr>
             <a:picLocks noChangeAspect="1"/>
           </p:cNvPicPr>
@@ -19259,7 +19259,7 @@
       </p:sp>
       <p:pic>
         <p:nvPicPr>
-          <p:cNvPr id="6" name="삽화:세겹.svg" descr="illust_4128192422178847090_1791735675.png"/>
+          <p:cNvPr id="6" name="삽화:세겹.svg" descr="illust_3841008245401083476_1791735675.png"/>
           <p:cNvPicPr>
             <a:picLocks noChangeAspect="1"/>
           </p:cNvPicPr>
@@ -19758,7 +19758,7 @@
                 <a:ea typeface="맑은 고딕"/>
                 <a:cs typeface="맑은 고딕"/>
               </a:rPr>
-              <a:t>조회에 실패한 것을 0이나 빈 값으로 바꾸어 내면, 값이 없다는 틀린 사실이 판단에 들어간다.</a:t>
+              <a:t>값 없음과 실패의 구분에 더해, 시간을 넘긴 응답과 잘린 응답도 결과에 적는 법이 따로 정해져 있다.</a:t>
             </a:r>
           </a:p>
         </p:txBody>
@@ -20144,6 +20144,190 @@
             </a:avLst>
           </a:prstGeom>
           <a:solidFill>
+            <a:srgbClr val="F3F6F9"/>
+          </a:solidFill>
+          <a:ln>
+            <a:noFill/>
+          </a:ln>
+        </p:spPr>
+        <p:txBody>
+          <a:bodyPr rtlCol="0" anchor="ctr"/>
+          <a:lstStyle/>
+          <a:p>
+            <a:pPr algn="ctr"/>
+          </a:p>
+        </p:txBody>
+      </p:sp>
+      <p:sp>
+        <p:nvSpPr>
+          <p:cNvPr id="15" name="TextBox 14"/>
+          <p:cNvSpPr txBox="1"/>
+          <p:nvPr/>
+        </p:nvSpPr>
+        <p:spPr>
+          <a:xfrm>
+            <a:off x="685800" y="3278123"/>
+            <a:ext cx="2514600" cy="914400"/>
+          </a:xfrm>
+          <a:prstGeom prst="rect">
+            <a:avLst/>
+          </a:prstGeom>
+          <a:noFill/>
+        </p:spPr>
+        <p:txBody>
+          <a:bodyPr wrap="square" anchor="ctr"/>
+          <a:lstStyle/>
+          <a:p>
+            <a:pPr algn="l">
+              <a:lnSpc>
+                <a:spcPct val="110000"/>
+              </a:lnSpc>
+            </a:pPr>
+            <a:r>
+              <a:rPr sz="1600" b="1">
+                <a:solidFill>
+                  <a:srgbClr val="13294B"/>
+                </a:solidFill>
+                <a:latin typeface="맑은 고딕"/>
+                <a:ea typeface="맑은 고딕"/>
+                <a:cs typeface="맑은 고딕"/>
+              </a:rPr>
+              <a:t>호출이 실패했다</a:t>
+            </a:r>
+          </a:p>
+        </p:txBody>
+      </p:sp>
+      <p:sp>
+        <p:nvSpPr>
+          <p:cNvPr id="16" name="TextBox 15"/>
+          <p:cNvSpPr txBox="1"/>
+          <p:nvPr/>
+        </p:nvSpPr>
+        <p:spPr>
+          <a:xfrm>
+            <a:off x="3200400" y="3278123"/>
+            <a:ext cx="6156655" cy="914400"/>
+          </a:xfrm>
+          <a:prstGeom prst="rect">
+            <a:avLst/>
+          </a:prstGeom>
+          <a:noFill/>
+        </p:spPr>
+        <p:txBody>
+          <a:bodyPr wrap="square" anchor="ctr"/>
+          <a:lstStyle/>
+          <a:p>
+            <a:pPr algn="l">
+              <a:lnSpc>
+                <a:spcPct val="110000"/>
+              </a:lnSpc>
+            </a:pPr>
+            <a:r>
+              <a:rPr sz="1400" b="0">
+                <a:solidFill>
+                  <a:srgbClr val="1F2A3A"/>
+                </a:solidFill>
+                <a:latin typeface="맑은 고딕"/>
+                <a:ea typeface="맑은 고딕"/>
+                <a:cs typeface="맑은 고딕"/>
+              </a:rPr>
+              <a:t>result가 error이고</a:t>
+            </a:r>
+          </a:p>
+          <a:p>
+            <a:pPr algn="l">
+              <a:lnSpc>
+                <a:spcPct val="110000"/>
+              </a:lnSpc>
+            </a:pPr>
+            <a:r>
+              <a:rPr sz="1400" b="0">
+                <a:solidFill>
+                  <a:srgbClr val="1F2A3A"/>
+                </a:solidFill>
+                <a:latin typeface="맑은 고딕"/>
+                <a:ea typeface="맑은 고딕"/>
+                <a:cs typeface="맑은 고딕"/>
+              </a:rPr>
+              <a:t>사유가 message에 담겨 온다</a:t>
+            </a:r>
+          </a:p>
+        </p:txBody>
+      </p:sp>
+      <p:sp>
+        <p:nvSpPr>
+          <p:cNvPr id="17" name="TextBox 16"/>
+          <p:cNvSpPr txBox="1"/>
+          <p:nvPr/>
+        </p:nvSpPr>
+        <p:spPr>
+          <a:xfrm>
+            <a:off x="9448495" y="3278123"/>
+            <a:ext cx="2103120" cy="914400"/>
+          </a:xfrm>
+          <a:prstGeom prst="rect">
+            <a:avLst/>
+          </a:prstGeom>
+          <a:noFill/>
+        </p:spPr>
+        <p:txBody>
+          <a:bodyPr wrap="square" anchor="ctr"/>
+          <a:lstStyle/>
+          <a:p>
+            <a:pPr algn="l">
+              <a:lnSpc>
+                <a:spcPct val="110000"/>
+              </a:lnSpc>
+            </a:pPr>
+            <a:r>
+              <a:rPr sz="1250" b="1">
+                <a:solidFill>
+                  <a:srgbClr val="556175"/>
+                </a:solidFill>
+                <a:latin typeface="맑은 고딕"/>
+                <a:ea typeface="맑은 고딕"/>
+                <a:cs typeface="맑은 고딕"/>
+              </a:rPr>
+              <a:t>실패로 적는다</a:t>
+            </a:r>
+          </a:p>
+          <a:p>
+            <a:pPr algn="l">
+              <a:lnSpc>
+                <a:spcPct val="110000"/>
+              </a:lnSpc>
+            </a:pPr>
+            <a:r>
+              <a:rPr sz="1250" b="1">
+                <a:solidFill>
+                  <a:srgbClr val="556175"/>
+                </a:solidFill>
+                <a:latin typeface="맑은 고딕"/>
+                <a:ea typeface="맑은 고딕"/>
+                <a:cs typeface="맑은 고딕"/>
+              </a:rPr>
+              <a:t>0이나 빈 값으로 바꾸지 않는다</a:t>
+            </a:r>
+          </a:p>
+        </p:txBody>
+      </p:sp>
+      <p:sp>
+        <p:nvSpPr>
+          <p:cNvPr id="18" name="Rounded Rectangle 17"/>
+          <p:cNvSpPr/>
+          <p:nvPr/>
+        </p:nvSpPr>
+        <p:spPr>
+          <a:xfrm>
+            <a:off x="548640" y="4224527"/>
+            <a:ext cx="11094415" cy="850392"/>
+          </a:xfrm>
+          <a:prstGeom prst="roundRect">
+            <a:avLst>
+              <a:gd name="adj" fmla="val 8000"/>
+            </a:avLst>
+          </a:prstGeom>
+          <a:solidFill>
             <a:srgbClr val="E7F3FD"/>
           </a:solidFill>
           <a:ln>
@@ -20160,190 +20344,6 @@
       </p:sp>
       <p:sp>
         <p:nvSpPr>
-          <p:cNvPr id="15" name="TextBox 14"/>
-          <p:cNvSpPr txBox="1"/>
-          <p:nvPr/>
-        </p:nvSpPr>
-        <p:spPr>
-          <a:xfrm>
-            <a:off x="685800" y="3278123"/>
-            <a:ext cx="2514600" cy="914400"/>
-          </a:xfrm>
-          <a:prstGeom prst="rect">
-            <a:avLst/>
-          </a:prstGeom>
-          <a:noFill/>
-        </p:spPr>
-        <p:txBody>
-          <a:bodyPr wrap="square" anchor="ctr"/>
-          <a:lstStyle/>
-          <a:p>
-            <a:pPr algn="l">
-              <a:lnSpc>
-                <a:spcPct val="110000"/>
-              </a:lnSpc>
-            </a:pPr>
-            <a:r>
-              <a:rPr sz="1600" b="1">
-                <a:solidFill>
-                  <a:srgbClr val="13294B"/>
-                </a:solidFill>
-                <a:latin typeface="맑은 고딕"/>
-                <a:ea typeface="맑은 고딕"/>
-                <a:cs typeface="맑은 고딕"/>
-              </a:rPr>
-              <a:t>호출이 실패했다</a:t>
-            </a:r>
-          </a:p>
-        </p:txBody>
-      </p:sp>
-      <p:sp>
-        <p:nvSpPr>
-          <p:cNvPr id="16" name="TextBox 15"/>
-          <p:cNvSpPr txBox="1"/>
-          <p:nvPr/>
-        </p:nvSpPr>
-        <p:spPr>
-          <a:xfrm>
-            <a:off x="3200400" y="3278123"/>
-            <a:ext cx="6156655" cy="914400"/>
-          </a:xfrm>
-          <a:prstGeom prst="rect">
-            <a:avLst/>
-          </a:prstGeom>
-          <a:noFill/>
-        </p:spPr>
-        <p:txBody>
-          <a:bodyPr wrap="square" anchor="ctr"/>
-          <a:lstStyle/>
-          <a:p>
-            <a:pPr algn="l">
-              <a:lnSpc>
-                <a:spcPct val="110000"/>
-              </a:lnSpc>
-            </a:pPr>
-            <a:r>
-              <a:rPr sz="1400" b="0">
-                <a:solidFill>
-                  <a:srgbClr val="1F2A3A"/>
-                </a:solidFill>
-                <a:latin typeface="맑은 고딕"/>
-                <a:ea typeface="맑은 고딕"/>
-                <a:cs typeface="맑은 고딕"/>
-              </a:rPr>
-              <a:t>result가 error이고</a:t>
-            </a:r>
-          </a:p>
-          <a:p>
-            <a:pPr algn="l">
-              <a:lnSpc>
-                <a:spcPct val="110000"/>
-              </a:lnSpc>
-            </a:pPr>
-            <a:r>
-              <a:rPr sz="1400" b="0">
-                <a:solidFill>
-                  <a:srgbClr val="1F2A3A"/>
-                </a:solidFill>
-                <a:latin typeface="맑은 고딕"/>
-                <a:ea typeface="맑은 고딕"/>
-                <a:cs typeface="맑은 고딕"/>
-              </a:rPr>
-              <a:t>사유가 message에 담겨 온다</a:t>
-            </a:r>
-          </a:p>
-        </p:txBody>
-      </p:sp>
-      <p:sp>
-        <p:nvSpPr>
-          <p:cNvPr id="17" name="TextBox 16"/>
-          <p:cNvSpPr txBox="1"/>
-          <p:nvPr/>
-        </p:nvSpPr>
-        <p:spPr>
-          <a:xfrm>
-            <a:off x="9448495" y="3278123"/>
-            <a:ext cx="2103120" cy="914400"/>
-          </a:xfrm>
-          <a:prstGeom prst="rect">
-            <a:avLst/>
-          </a:prstGeom>
-          <a:noFill/>
-        </p:spPr>
-        <p:txBody>
-          <a:bodyPr wrap="square" anchor="ctr"/>
-          <a:lstStyle/>
-          <a:p>
-            <a:pPr algn="l">
-              <a:lnSpc>
-                <a:spcPct val="110000"/>
-              </a:lnSpc>
-            </a:pPr>
-            <a:r>
-              <a:rPr sz="1250" b="1">
-                <a:solidFill>
-                  <a:srgbClr val="1A6FC4"/>
-                </a:solidFill>
-                <a:latin typeface="맑은 고딕"/>
-                <a:ea typeface="맑은 고딕"/>
-                <a:cs typeface="맑은 고딕"/>
-              </a:rPr>
-              <a:t>실패로 적는다</a:t>
-            </a:r>
-          </a:p>
-          <a:p>
-            <a:pPr algn="l">
-              <a:lnSpc>
-                <a:spcPct val="110000"/>
-              </a:lnSpc>
-            </a:pPr>
-            <a:r>
-              <a:rPr sz="1250" b="1">
-                <a:solidFill>
-                  <a:srgbClr val="1A6FC4"/>
-                </a:solidFill>
-                <a:latin typeface="맑은 고딕"/>
-                <a:ea typeface="맑은 고딕"/>
-                <a:cs typeface="맑은 고딕"/>
-              </a:rPr>
-              <a:t>0이나 빈 값으로 바꾸지 않는다</a:t>
-            </a:r>
-          </a:p>
-        </p:txBody>
-      </p:sp>
-      <p:sp>
-        <p:nvSpPr>
-          <p:cNvPr id="18" name="Rounded Rectangle 17"/>
-          <p:cNvSpPr/>
-          <p:nvPr/>
-        </p:nvSpPr>
-        <p:spPr>
-          <a:xfrm>
-            <a:off x="548640" y="4224527"/>
-            <a:ext cx="11094415" cy="850392"/>
-          </a:xfrm>
-          <a:prstGeom prst="roundRect">
-            <a:avLst>
-              <a:gd name="adj" fmla="val 8000"/>
-            </a:avLst>
-          </a:prstGeom>
-          <a:solidFill>
-            <a:srgbClr val="F3F6F9"/>
-          </a:solidFill>
-          <a:ln>
-            <a:noFill/>
-          </a:ln>
-        </p:spPr>
-        <p:txBody>
-          <a:bodyPr rtlCol="0" anchor="ctr"/>
-          <a:lstStyle/>
-          <a:p>
-            <a:pPr algn="ctr"/>
-          </a:p>
-        </p:txBody>
-      </p:sp>
-      <p:sp>
-        <p:nvSpPr>
           <p:cNvPr id="19" name="TextBox 18"/>
           <p:cNvSpPr txBox="1"/>
           <p:nvPr/>
@@ -20466,7 +20466,7 @@
             <a:r>
               <a:rPr sz="1250" b="1">
                 <a:solidFill>
-                  <a:srgbClr val="556175"/>
+                  <a:srgbClr val="1A6FC4"/>
                 </a:solidFill>
                 <a:latin typeface="맑은 고딕"/>
                 <a:ea typeface="맑은 고딕"/>
@@ -22327,7 +22327,7 @@
                 <a:ea typeface="맑은 고딕"/>
                 <a:cs typeface="맑은 고딕"/>
               </a:rPr>
-              <a:t>이 실습을 마치면 HYD의 읽기 도구를 직접 부른 호출 한 건의 입력과 조회 결과, 그리고 호출 기록이 남는다.</a:t>
+              <a:t>읽기 도구를 직접 불러 보면 그 호출의 입력과 조회 결과가 호출 기록에 그대로 남는 것을 확인할 수 있다.</a:t>
             </a:r>
           </a:p>
         </p:txBody>
@@ -25644,7 +25644,7 @@
                 <a:ea typeface="맑은 고딕"/>
                 <a:cs typeface="맑은 고딕"/>
               </a:rPr>
-              <a:t>이 실습을 마치면 한 요청으로 만들어 저장한 업무 항목과, 도구가 실패했을 때 미완료로 표시한 항목의 기록이 남는다.</a:t>
+              <a:t>한 요청으로 만들어 저장한 업무 항목과, 도구가 실패했을 때 미완료로 표시한 항목의 기록이 이 실습의 결과물이다.</a:t>
             </a:r>
           </a:p>
         </p:txBody>
@@ -29738,7 +29738,7 @@
                 <a:ea typeface="맑은 고딕"/>
                 <a:cs typeface="맑은 고딕"/>
               </a:rPr>
-              <a:t>연결 검사를 통과한 서버의 도구가 read_rows(표시 true), update_row(false), export(표시 없음)이다.</a:t>
+              <a:t>새로 등록한 서버의 도구 목록이 read_rows(표시 true), update_row(false), export(표시 없음)이다.</a:t>
             </a:r>
           </a:p>
         </p:txBody>
@@ -32461,7 +32461,7 @@
       </p:sp>
       <p:pic>
         <p:nvPicPr>
-          <p:cNvPr id="6" name="삽화:고리_1.svg" descr="illust_2964633879719843670_1791735675.png"/>
+          <p:cNvPr id="6" name="삽화:고리_1.svg" descr="illust_176168887022988183_1791735675.png"/>
           <p:cNvPicPr>
             <a:picLocks noChangeAspect="1"/>
           </p:cNvPicPr>

--- a/docs/교재/통합반_오프라인/06회차/통합반_오프라인_06회차.pptx
+++ b/docs/교재/통합반_오프라인/06회차/통합반_오프라인_06회차.pptx
@@ -6345,7 +6345,7 @@
       </p:sp>
       <p:pic>
         <p:nvPicPr>
-          <p:cNvPr id="6" name="삽화:스킬문서.svg" descr="illust_3352974254540190087_1791735675.png"/>
+          <p:cNvPr id="6" name="삽화:스킬문서.svg" descr="illust_8458925111014376587_1791735675.png"/>
           <p:cNvPicPr>
             <a:picLocks noChangeAspect="1"/>
           </p:cNvPicPr>
@@ -7909,7 +7909,7 @@
       </p:sp>
       <p:pic>
         <p:nvPicPr>
-          <p:cNvPr id="6" name="삽화:두절차.svg" descr="illust_242307851978587257_1791735675.png"/>
+          <p:cNvPr id="6" name="삽화:두절차.svg" descr="illust_6419683341022890351_1791735675.png"/>
           <p:cNvPicPr>
             <a:picLocks noChangeAspect="1"/>
           </p:cNvPicPr>
@@ -10315,7 +10315,7 @@
       </p:sp>
       <p:pic>
         <p:nvPicPr>
-          <p:cNvPr id="6" name="삽화:연결의수.svg" descr="illust_3332905791933954658_1791735675.png"/>
+          <p:cNvPr id="6" name="삽화:연결의수.svg" descr="illust_2821046331539559613_1791735675.png"/>
           <p:cNvPicPr>
             <a:picLocks noChangeAspect="1"/>
           </p:cNvPicPr>
@@ -11486,7 +11486,7 @@
       </p:sp>
       <p:pic>
         <p:nvPicPr>
-          <p:cNvPr id="6" name="삽화:MCP구성.svg" descr="illust_1171167847395386957_1791735675.png"/>
+          <p:cNvPr id="6" name="삽화:MCP구성.svg" descr="illust_7183752105593716494_1791735675.png"/>
           <p:cNvPicPr>
             <a:picLocks noChangeAspect="1"/>
           </p:cNvPicPr>
@@ -14091,7 +14091,7 @@
       </p:sp>
       <p:pic>
         <p:nvPicPr>
-          <p:cNvPr id="6" name="삽화:목록호출.svg" descr="illust_6801412339466788897_1791735675.png"/>
+          <p:cNvPr id="6" name="삽화:목록호출.svg" descr="illust_3141305685591674157_1791735675.png"/>
           <p:cNvPicPr>
             <a:picLocks noChangeAspect="1"/>
           </p:cNvPicPr>
@@ -15850,7 +15850,7 @@
       </p:sp>
       <p:pic>
         <p:nvPicPr>
-          <p:cNvPr id="6" name="삽화:연결방식.svg" descr="illust_705113174053857914_1791735675.png"/>
+          <p:cNvPr id="6" name="삽화:연결방식.svg" descr="illust_6921397756731303223_1791735675.png"/>
           <p:cNvPicPr>
             <a:picLocks noChangeAspect="1"/>
           </p:cNvPicPr>
@@ -19259,7 +19259,7 @@
       </p:sp>
       <p:pic>
         <p:nvPicPr>
-          <p:cNvPr id="6" name="삽화:세겹.svg" descr="illust_3841008245401083476_1791735675.png"/>
+          <p:cNvPr id="6" name="삽화:세겹.svg" descr="illust_7233162181092959341_1791735675.png"/>
           <p:cNvPicPr>
             <a:picLocks noChangeAspect="1"/>
           </p:cNvPicPr>
@@ -27747,7 +27747,7 @@
                 <a:ea typeface="맑은 고딕"/>
                 <a:cs typeface="맑은 고딕"/>
               </a:rPr>
-              <a:t>배운 내용을 바탕으로 정답을 맞춰보세요.</a:t>
+              <a:t>배운 내용을 바탕으로 정답을 맞혀 보세요.</a:t>
             </a:r>
           </a:p>
         </p:txBody>
@@ -32461,7 +32461,7 @@
       </p:sp>
       <p:pic>
         <p:nvPicPr>
-          <p:cNvPr id="6" name="삽화:고리_1.svg" descr="illust_176168887022988183_1791735675.png"/>
+          <p:cNvPr id="6" name="삽화:고리_1.svg" descr="illust_2190328938183098206_1791735675.png"/>
           <p:cNvPicPr>
             <a:picLocks noChangeAspect="1"/>
           </p:cNvPicPr>

--- a/docs/교재/통합반_오프라인/06회차/통합반_오프라인_06회차.pptx
+++ b/docs/교재/통합반_오프라인/06회차/통합반_오프라인_06회차.pptx
@@ -1733,7 +1733,7 @@
           <a:lstStyle/>
           <a:p>
             <a:r>
-              <a:t>둘째 실습은 VS Code의 Claude Code에서 진행합니다. 준비된 파일시스템, Git, 시간 서버를 각각 연결하고 접근 권한을 서버별로 정합니다. 서버마다 도구 이름과 필수 인수와 호출 결과를 견준 뒤, 권한이 없는 경로를 읽게 했을 때와 서버가 연결되지 않았을 때 돌아오는 오류를 확인합니다.</a:t>
+              <a:t>둘째 실습은 VS Code의 AI 코딩 도구에서 진행합니다. 준비된 파일시스템, Git, 시간 서버를 각각 연결하고 접근 권한을 서버별로 정합니다. 서버마다 도구 이름과 필수 인수와 호출 결과를 견준 뒤, 권한이 없는 경로를 읽게 했을 때와 서버가 연결되지 않았을 때 돌아오는 오류를 확인합니다.</a:t>
             </a:r>
           </a:p>
         </p:txBody>
@@ -6345,7 +6345,7 @@
       </p:sp>
       <p:pic>
         <p:nvPicPr>
-          <p:cNvPr id="6" name="삽화:스킬문서.svg" descr="illust_8458925111014376587_1791735675.png"/>
+          <p:cNvPr id="6" name="삽화:스킬문서.svg" descr="illust_1982926023458029130_1791735675.png"/>
           <p:cNvPicPr>
             <a:picLocks noChangeAspect="1"/>
           </p:cNvPicPr>
@@ -7909,7 +7909,7 @@
       </p:sp>
       <p:pic>
         <p:nvPicPr>
-          <p:cNvPr id="6" name="삽화:두절차.svg" descr="illust_6419683341022890351_1791735675.png"/>
+          <p:cNvPr id="6" name="삽화:두절차.svg" descr="illust_2694494847657208125_1791735675.png"/>
           <p:cNvPicPr>
             <a:picLocks noChangeAspect="1"/>
           </p:cNvPicPr>
@@ -10315,7 +10315,7 @@
       </p:sp>
       <p:pic>
         <p:nvPicPr>
-          <p:cNvPr id="6" name="삽화:연결의수.svg" descr="illust_2821046331539559613_1791735675.png"/>
+          <p:cNvPr id="6" name="삽화:연결의수.svg" descr="illust_927458200740472950_1791735675.png"/>
           <p:cNvPicPr>
             <a:picLocks noChangeAspect="1"/>
           </p:cNvPicPr>
@@ -11486,7 +11486,7 @@
       </p:sp>
       <p:pic>
         <p:nvPicPr>
-          <p:cNvPr id="6" name="삽화:MCP구성.svg" descr="illust_7183752105593716494_1791735675.png"/>
+          <p:cNvPr id="6" name="삽화:MCP구성.svg" descr="illust_4182785544208856471_1791735675.png"/>
           <p:cNvPicPr>
             <a:picLocks noChangeAspect="1"/>
           </p:cNvPicPr>
@@ -14091,7 +14091,7 @@
       </p:sp>
       <p:pic>
         <p:nvPicPr>
-          <p:cNvPr id="6" name="삽화:목록호출.svg" descr="illust_3141305685591674157_1791735675.png"/>
+          <p:cNvPr id="6" name="삽화:목록호출.svg" descr="illust_8386374699817263912_1791735675.png"/>
           <p:cNvPicPr>
             <a:picLocks noChangeAspect="1"/>
           </p:cNvPicPr>
@@ -15850,7 +15850,7 @@
       </p:sp>
       <p:pic>
         <p:nvPicPr>
-          <p:cNvPr id="6" name="삽화:연결방식.svg" descr="illust_6921397756731303223_1791735675.png"/>
+          <p:cNvPr id="6" name="삽화:연결방식.svg" descr="illust_6217407591241111731_1791735675.png"/>
           <p:cNvPicPr>
             <a:picLocks noChangeAspect="1"/>
           </p:cNvPicPr>
@@ -19259,7 +19259,7 @@
       </p:sp>
       <p:pic>
         <p:nvPicPr>
-          <p:cNvPr id="6" name="삽화:세겹.svg" descr="illust_7233162181092959341_1791735675.png"/>
+          <p:cNvPr id="6" name="삽화:세겹.svg" descr="illust_5036382549211810122_1791735675.png"/>
           <p:cNvPicPr>
             <a:picLocks noChangeAspect="1"/>
           </p:cNvPicPr>
@@ -23398,7 +23398,7 @@
                 <a:ea typeface="맑은 고딕"/>
                 <a:cs typeface="맑은 고딕"/>
               </a:rPr>
-              <a:t>Claude Code에 파일시스템, Git, 시간 서버를 연결하고 도구와 호출 결과를 견준다</a:t>
+              <a:t>AI 코딩 도구에 파일시스템, Git, 시간 서버를 연결하고 도구와 호출 결과를 견준다</a:t>
             </a:r>
           </a:p>
         </p:txBody>
@@ -32461,7 +32461,7 @@
       </p:sp>
       <p:pic>
         <p:nvPicPr>
-          <p:cNvPr id="6" name="삽화:고리_1.svg" descr="illust_2190328938183098206_1791735675.png"/>
+          <p:cNvPr id="6" name="삽화:고리_1.svg" descr="illust_6778538202057821004_1791735675.png"/>
           <p:cNvPicPr>
             <a:picLocks noChangeAspect="1"/>
           </p:cNvPicPr>
